--- a/11а клас/РС/7. Свързване на приложения с бази от данни/03. SQL инжекция и параметризирани команди.pptx
+++ b/11а клас/РС/7. Свързване на приложения с бази от данни/03. SQL инжекция и параметризирани команди.pptx
@@ -18,6 +18,8 @@
     <p:sldId id="630" r:id="rId9"/>
     <p:sldId id="631" r:id="rId10"/>
     <p:sldId id="572" r:id="rId11"/>
+    <p:sldId id="632" r:id="rId19"/>
+    <p:sldId id="633" r:id="rId20"/>
   </p:sldIdLst>
   <p:sldSz cx="12192000" cy="6858000"/>
   <p:notesSz cx="6858000" cy="9144000"/>
@@ -927,7 +929,9 @@
           <a:bodyPr/>
           <a:lstStyle/>
           <a:p>
-            <a:endParaRPr lang="bg-BG"/>
+            <a:r>
+              <a:t>Две теми: SQL инжекция (какво е и как работи) + параметризирани заявки (защитата).</a:t>
+            </a:r>
           </a:p>
         </p:txBody>
       </p:sp>
@@ -1012,6 +1016,706 @@
         <p14:creationId xmlns:p14="http://schemas.microsoft.com/office/powerpoint/2010/main" val="4272781246"/>
       </p:ext>
     </p:extLst>
+  </p:cSld>
+  <p:clrMapOvr>
+    <a:masterClrMapping/>
+  </p:clrMapOvr>
+</p:notes>
+</file>
+
+<file path=ppt/notesSlides/notesSlide10.xml><?xml version="1.0" encoding="utf-8"?>
+<p:notes xmlns:a="http://schemas.openxmlformats.org/drawingml/2006/main" xmlns:p="http://schemas.openxmlformats.org/presentationml/2006/main" xmlns:r="http://schemas.openxmlformats.org/officeDocument/2006/relationships">
+  <p:cSld>
+    <p:spTree>
+      <p:nvGrpSpPr>
+        <p:cNvPr id="1" name=""/>
+        <p:cNvGrpSpPr/>
+        <p:nvPr/>
+      </p:nvGrpSpPr>
+      <p:grpSpPr>
+        <a:xfrm>
+          <a:off x="0" y="0"/>
+          <a:ext cx="0" cy="0"/>
+          <a:chOff x="0" y="0"/>
+          <a:chExt cx="0" cy="0"/>
+        </a:xfrm>
+      </p:grpSpPr>
+      <p:sp>
+        <p:nvSpPr>
+          <p:cNvPr id="2" name="Slide Image Placeholder 1"/>
+          <p:cNvSpPr>
+            <a:spLocks noGrp="1"/>
+          </p:cNvSpPr>
+          <p:nvPr>
+            <p:ph type="sldImg" idx="2"/>
+          </p:nvPr>
+        </p:nvSpPr>
+        <p:spPr/>
+      </p:sp>
+      <p:sp>
+        <p:nvSpPr>
+          <p:cNvPr id="3" name="Notes Placeholder 2"/>
+          <p:cNvSpPr>
+            <a:spLocks noGrp="1"/>
+          </p:cNvSpPr>
+          <p:nvPr>
+            <p:ph type="body" idx="3" sz="quarter"/>
+          </p:nvPr>
+        </p:nvSpPr>
+        <p:spPr/>
+        <p:txBody>
+          <a:bodyPr/>
+          <a:lstStyle/>
+          <a:p>
+            <a:r>
+              <a:t>Демо в SSMS. Покажете уязвимата vs защитената заявка.</a:t>
+            </a:r>
+          </a:p>
+        </p:txBody>
+      </p:sp>
+      <p:sp>
+        <p:nvSpPr>
+          <p:cNvPr id="4" name="Slide Number Placeholder 3"/>
+          <p:cNvSpPr>
+            <a:spLocks noGrp="1"/>
+          </p:cNvSpPr>
+          <p:nvPr>
+            <p:ph type="sldNum" idx="5" sz="quarter"/>
+          </p:nvPr>
+        </p:nvSpPr>
+        <p:spPr/>
+      </p:sp>
+    </p:spTree>
+  </p:cSld>
+  <p:clrMapOvr>
+    <a:masterClrMapping/>
+  </p:clrMapOvr>
+</p:notes>
+</file>
+
+<file path=ppt/notesSlides/notesSlide11.xml><?xml version="1.0" encoding="utf-8"?>
+<p:notes xmlns:a="http://schemas.openxmlformats.org/drawingml/2006/main" xmlns:p="http://schemas.openxmlformats.org/presentationml/2006/main" xmlns:r="http://schemas.openxmlformats.org/officeDocument/2006/relationships">
+  <p:cSld>
+    <p:spTree>
+      <p:nvGrpSpPr>
+        <p:cNvPr id="1" name=""/>
+        <p:cNvGrpSpPr/>
+        <p:nvPr/>
+      </p:nvGrpSpPr>
+      <p:grpSpPr>
+        <a:xfrm>
+          <a:off x="0" y="0"/>
+          <a:ext cx="0" cy="0"/>
+          <a:chOff x="0" y="0"/>
+          <a:chExt cx="0" cy="0"/>
+        </a:xfrm>
+      </p:grpSpPr>
+      <p:sp>
+        <p:nvSpPr>
+          <p:cNvPr id="2" name="Slide Image Placeholder 1"/>
+          <p:cNvSpPr>
+            <a:spLocks noGrp="1"/>
+          </p:cNvSpPr>
+          <p:nvPr>
+            <p:ph type="sldImg" idx="2"/>
+          </p:nvPr>
+        </p:nvSpPr>
+        <p:spPr/>
+      </p:sp>
+      <p:sp>
+        <p:nvSpPr>
+          <p:cNvPr id="3" name="Notes Placeholder 2"/>
+          <p:cNvSpPr>
+            <a:spLocks noGrp="1"/>
+          </p:cNvSpPr>
+          <p:nvPr>
+            <p:ph type="body" idx="3" sz="quarter"/>
+          </p:nvPr>
+        </p:nvSpPr>
+        <p:spPr/>
+        <p:txBody>
+          <a:bodyPr/>
+          <a:lstStyle/>
+          <a:p>
+            <a:r>
+              <a:t>Напишете правилото с голям шрифт на дъската.</a:t>
+            </a:r>
+          </a:p>
+        </p:txBody>
+      </p:sp>
+      <p:sp>
+        <p:nvSpPr>
+          <p:cNvPr id="4" name="Slide Number Placeholder 3"/>
+          <p:cNvSpPr>
+            <a:spLocks noGrp="1"/>
+          </p:cNvSpPr>
+          <p:nvPr>
+            <p:ph type="sldNum" idx="5" sz="quarter"/>
+          </p:nvPr>
+        </p:nvSpPr>
+        <p:spPr/>
+      </p:sp>
+    </p:spTree>
+  </p:cSld>
+  <p:clrMapOvr>
+    <a:masterClrMapping/>
+  </p:clrMapOvr>
+</p:notes>
+</file>
+
+<file path=ppt/notesSlides/notesSlide2.xml><?xml version="1.0" encoding="utf-8"?>
+<p:notes xmlns:a="http://schemas.openxmlformats.org/drawingml/2006/main" xmlns:p="http://schemas.openxmlformats.org/presentationml/2006/main" xmlns:r="http://schemas.openxmlformats.org/officeDocument/2006/relationships">
+  <p:cSld>
+    <p:spTree>
+      <p:nvGrpSpPr>
+        <p:cNvPr id="1" name=""/>
+        <p:cNvGrpSpPr/>
+        <p:nvPr/>
+      </p:nvGrpSpPr>
+      <p:grpSpPr>
+        <a:xfrm>
+          <a:off x="0" y="0"/>
+          <a:ext cx="0" cy="0"/>
+          <a:chOff x="0" y="0"/>
+          <a:chExt cx="0" cy="0"/>
+        </a:xfrm>
+      </p:grpSpPr>
+      <p:sp>
+        <p:nvSpPr>
+          <p:cNvPr id="2" name="Slide Image Placeholder 1"/>
+          <p:cNvSpPr>
+            <a:spLocks noGrp="1"/>
+          </p:cNvSpPr>
+          <p:nvPr>
+            <p:ph type="sldImg" idx="2"/>
+          </p:nvPr>
+        </p:nvSpPr>
+        <p:spPr/>
+      </p:sp>
+      <p:sp>
+        <p:nvSpPr>
+          <p:cNvPr id="3" name="Notes Placeholder 2"/>
+          <p:cNvSpPr>
+            <a:spLocks noGrp="1"/>
+          </p:cNvSpPr>
+          <p:nvPr>
+            <p:ph type="body" idx="3" sz="quarter"/>
+          </p:nvPr>
+        </p:nvSpPr>
+        <p:spPr/>
+        <p:txBody>
+          <a:bodyPr/>
+          <a:lstStyle/>
+          <a:p>
+            <a:r>
+              <a:t>Въпрос: Опитвали ли сте admin/123 на случаен сайт? SQL инжекцията е точно това.</a:t>
+            </a:r>
+          </a:p>
+        </p:txBody>
+      </p:sp>
+      <p:sp>
+        <p:nvSpPr>
+          <p:cNvPr id="4" name="Slide Number Placeholder 3"/>
+          <p:cNvSpPr>
+            <a:spLocks noGrp="1"/>
+          </p:cNvSpPr>
+          <p:nvPr>
+            <p:ph type="sldNum" idx="5" sz="quarter"/>
+          </p:nvPr>
+        </p:nvSpPr>
+        <p:spPr/>
+      </p:sp>
+    </p:spTree>
+  </p:cSld>
+  <p:clrMapOvr>
+    <a:masterClrMapping/>
+  </p:clrMapOvr>
+</p:notes>
+</file>
+
+<file path=ppt/notesSlides/notesSlide3.xml><?xml version="1.0" encoding="utf-8"?>
+<p:notes xmlns:a="http://schemas.openxmlformats.org/drawingml/2006/main" xmlns:p="http://schemas.openxmlformats.org/presentationml/2006/main" xmlns:r="http://schemas.openxmlformats.org/officeDocument/2006/relationships">
+  <p:cSld>
+    <p:spTree>
+      <p:nvGrpSpPr>
+        <p:cNvPr id="1" name=""/>
+        <p:cNvGrpSpPr/>
+        <p:nvPr/>
+      </p:nvGrpSpPr>
+      <p:grpSpPr>
+        <a:xfrm>
+          <a:off x="0" y="0"/>
+          <a:ext cx="0" cy="0"/>
+          <a:chOff x="0" y="0"/>
+          <a:chExt cx="0" cy="0"/>
+        </a:xfrm>
+      </p:grpSpPr>
+      <p:sp>
+        <p:nvSpPr>
+          <p:cNvPr id="2" name="Slide Image Placeholder 1"/>
+          <p:cNvSpPr>
+            <a:spLocks noGrp="1"/>
+          </p:cNvSpPr>
+          <p:nvPr>
+            <p:ph type="sldImg" idx="2"/>
+          </p:nvPr>
+        </p:nvSpPr>
+        <p:spPr/>
+      </p:sp>
+      <p:sp>
+        <p:nvSpPr>
+          <p:cNvPr id="3" name="Notes Placeholder 2"/>
+          <p:cNvSpPr>
+            <a:spLocks noGrp="1"/>
+          </p:cNvSpPr>
+          <p:nvPr>
+            <p:ph type="body" idx="3" sz="quarter"/>
+          </p:nvPr>
+        </p:nvSpPr>
+        <p:spPr/>
+        <p:txBody>
+          <a:bodyPr/>
+          <a:lstStyle/>
+          <a:p>
+            <a:r>
+              <a:t>РЕАЛЕН ПРИМЕР: 2008 - хакери откраднаха 130 млн. кредитни карти от Heartland Payment чрез SQL инжекция.</a:t>
+            </a:r>
+          </a:p>
+        </p:txBody>
+      </p:sp>
+      <p:sp>
+        <p:nvSpPr>
+          <p:cNvPr id="4" name="Slide Number Placeholder 3"/>
+          <p:cNvSpPr>
+            <a:spLocks noGrp="1"/>
+          </p:cNvSpPr>
+          <p:nvPr>
+            <p:ph type="sldNum" idx="5" sz="quarter"/>
+          </p:nvPr>
+        </p:nvSpPr>
+        <p:spPr/>
+      </p:sp>
+    </p:spTree>
+  </p:cSld>
+  <p:clrMapOvr>
+    <a:masterClrMapping/>
+  </p:clrMapOvr>
+</p:notes>
+</file>
+
+<file path=ppt/notesSlides/notesSlide4.xml><?xml version="1.0" encoding="utf-8"?>
+<p:notes xmlns:a="http://schemas.openxmlformats.org/drawingml/2006/main" xmlns:p="http://schemas.openxmlformats.org/presentationml/2006/main" xmlns:r="http://schemas.openxmlformats.org/officeDocument/2006/relationships">
+  <p:cSld>
+    <p:spTree>
+      <p:nvGrpSpPr>
+        <p:cNvPr id="1" name=""/>
+        <p:cNvGrpSpPr/>
+        <p:nvPr/>
+      </p:nvGrpSpPr>
+      <p:grpSpPr>
+        <a:xfrm>
+          <a:off x="0" y="0"/>
+          <a:ext cx="0" cy="0"/>
+          <a:chOff x="0" y="0"/>
+          <a:chExt cx="0" cy="0"/>
+        </a:xfrm>
+      </p:grpSpPr>
+      <p:sp>
+        <p:nvSpPr>
+          <p:cNvPr id="2" name="Slide Image Placeholder 1"/>
+          <p:cNvSpPr>
+            <a:spLocks noGrp="1"/>
+          </p:cNvSpPr>
+          <p:nvPr>
+            <p:ph type="sldImg" idx="2"/>
+          </p:nvPr>
+        </p:nvSpPr>
+        <p:spPr/>
+      </p:sp>
+      <p:sp>
+        <p:nvSpPr>
+          <p:cNvPr id="3" name="Notes Placeholder 2"/>
+          <p:cNvSpPr>
+            <a:spLocks noGrp="1"/>
+          </p:cNvSpPr>
+          <p:nvPr>
+            <p:ph type="body" idx="3" sz="quarter"/>
+          </p:nvPr>
+        </p:nvSpPr>
+        <p:spPr/>
+        <p:txBody>
+          <a:bodyPr/>
+          <a:lstStyle/>
+          <a:p>
+            <a:r>
+              <a:t>ПОКАЖЕТЕ СТЪПКА ПО СТЪПКА: username=' OR 1=1 --' прави WHERE условието винаги вярно.</a:t>
+            </a:r>
+          </a:p>
+        </p:txBody>
+      </p:sp>
+      <p:sp>
+        <p:nvSpPr>
+          <p:cNvPr id="4" name="Slide Number Placeholder 3"/>
+          <p:cNvSpPr>
+            <a:spLocks noGrp="1"/>
+          </p:cNvSpPr>
+          <p:nvPr>
+            <p:ph type="sldNum" idx="5" sz="quarter"/>
+          </p:nvPr>
+        </p:nvSpPr>
+        <p:spPr/>
+      </p:sp>
+    </p:spTree>
+  </p:cSld>
+  <p:clrMapOvr>
+    <a:masterClrMapping/>
+  </p:clrMapOvr>
+</p:notes>
+</file>
+
+<file path=ppt/notesSlides/notesSlide5.xml><?xml version="1.0" encoding="utf-8"?>
+<p:notes xmlns:a="http://schemas.openxmlformats.org/drawingml/2006/main" xmlns:p="http://schemas.openxmlformats.org/presentationml/2006/main" xmlns:r="http://schemas.openxmlformats.org/officeDocument/2006/relationships">
+  <p:cSld>
+    <p:spTree>
+      <p:nvGrpSpPr>
+        <p:cNvPr id="1" name=""/>
+        <p:cNvGrpSpPr/>
+        <p:nvPr/>
+      </p:nvGrpSpPr>
+      <p:grpSpPr>
+        <a:xfrm>
+          <a:off x="0" y="0"/>
+          <a:ext cx="0" cy="0"/>
+          <a:chOff x="0" y="0"/>
+          <a:chExt cx="0" cy="0"/>
+        </a:xfrm>
+      </p:grpSpPr>
+      <p:sp>
+        <p:nvSpPr>
+          <p:cNvPr id="2" name="Slide Image Placeholder 1"/>
+          <p:cNvSpPr>
+            <a:spLocks noGrp="1"/>
+          </p:cNvSpPr>
+          <p:nvPr>
+            <p:ph type="sldImg" idx="2"/>
+          </p:nvPr>
+        </p:nvSpPr>
+        <p:spPr/>
+      </p:sp>
+      <p:sp>
+        <p:nvSpPr>
+          <p:cNvPr id="3" name="Notes Placeholder 2"/>
+          <p:cNvSpPr>
+            <a:spLocks noGrp="1"/>
+          </p:cNvSpPr>
+          <p:nvPr>
+            <p:ph type="body" idx="3" sz="quarter"/>
+          </p:nvPr>
+        </p:nvSpPr>
+        <p:spPr/>
+        <p:txBody>
+          <a:bodyPr/>
+          <a:lstStyle/>
+          <a:p>
+            <a:r>
+              <a:t>-- коментира остатъка. OR 1=1 = винаги вярно. ПОКажете в SSMS двете SQL заявки.</a:t>
+            </a:r>
+          </a:p>
+        </p:txBody>
+      </p:sp>
+      <p:sp>
+        <p:nvSpPr>
+          <p:cNvPr id="4" name="Slide Number Placeholder 3"/>
+          <p:cNvSpPr>
+            <a:spLocks noGrp="1"/>
+          </p:cNvSpPr>
+          <p:nvPr>
+            <p:ph type="sldNum" idx="5" sz="quarter"/>
+          </p:nvPr>
+        </p:nvSpPr>
+        <p:spPr/>
+      </p:sp>
+    </p:spTree>
+  </p:cSld>
+  <p:clrMapOvr>
+    <a:masterClrMapping/>
+  </p:clrMapOvr>
+</p:notes>
+</file>
+
+<file path=ppt/notesSlides/notesSlide6.xml><?xml version="1.0" encoding="utf-8"?>
+<p:notes xmlns:a="http://schemas.openxmlformats.org/drawingml/2006/main" xmlns:p="http://schemas.openxmlformats.org/presentationml/2006/main" xmlns:r="http://schemas.openxmlformats.org/officeDocument/2006/relationships">
+  <p:cSld>
+    <p:spTree>
+      <p:nvGrpSpPr>
+        <p:cNvPr id="1" name=""/>
+        <p:cNvGrpSpPr/>
+        <p:nvPr/>
+      </p:nvGrpSpPr>
+      <p:grpSpPr>
+        <a:xfrm>
+          <a:off x="0" y="0"/>
+          <a:ext cx="0" cy="0"/>
+          <a:chOff x="0" y="0"/>
+          <a:chExt cx="0" cy="0"/>
+        </a:xfrm>
+      </p:grpSpPr>
+      <p:sp>
+        <p:nvSpPr>
+          <p:cNvPr id="2" name="Slide Image Placeholder 1"/>
+          <p:cNvSpPr>
+            <a:spLocks noGrp="1"/>
+          </p:cNvSpPr>
+          <p:nvPr>
+            <p:ph type="sldImg" idx="2"/>
+          </p:nvPr>
+        </p:nvSpPr>
+        <p:spPr/>
+      </p:sp>
+      <p:sp>
+        <p:nvSpPr>
+          <p:cNvPr id="3" name="Notes Placeholder 2"/>
+          <p:cNvSpPr>
+            <a:spLocks noGrp="1"/>
+          </p:cNvSpPr>
+          <p:nvPr>
+            <p:ph type="body" idx="3" sz="quarter"/>
+          </p:nvPr>
+        </p:nvSpPr>
+        <p:spPr/>
+        <p:txBody>
+          <a:bodyPr/>
+          <a:lstStyle/>
+          <a:p>
+            <a:r>
+              <a:t>КЛЮЧ: Проблемът е конкатенацията. Потребителят контролира SQL-а.</a:t>
+            </a:r>
+          </a:p>
+        </p:txBody>
+      </p:sp>
+      <p:sp>
+        <p:nvSpPr>
+          <p:cNvPr id="4" name="Slide Number Placeholder 3"/>
+          <p:cNvSpPr>
+            <a:spLocks noGrp="1"/>
+          </p:cNvSpPr>
+          <p:nvPr>
+            <p:ph type="sldNum" idx="5" sz="quarter"/>
+          </p:nvPr>
+        </p:nvSpPr>
+        <p:spPr/>
+      </p:sp>
+    </p:spTree>
+  </p:cSld>
+  <p:clrMapOvr>
+    <a:masterClrMapping/>
+  </p:clrMapOvr>
+</p:notes>
+</file>
+
+<file path=ppt/notesSlides/notesSlide7.xml><?xml version="1.0" encoding="utf-8"?>
+<p:notes xmlns:a="http://schemas.openxmlformats.org/drawingml/2006/main" xmlns:p="http://schemas.openxmlformats.org/presentationml/2006/main" xmlns:r="http://schemas.openxmlformats.org/officeDocument/2006/relationships">
+  <p:cSld>
+    <p:spTree>
+      <p:nvGrpSpPr>
+        <p:cNvPr id="1" name=""/>
+        <p:cNvGrpSpPr/>
+        <p:nvPr/>
+      </p:nvGrpSpPr>
+      <p:grpSpPr>
+        <a:xfrm>
+          <a:off x="0" y="0"/>
+          <a:ext cx="0" cy="0"/>
+          <a:chOff x="0" y="0"/>
+          <a:chExt cx="0" cy="0"/>
+        </a:xfrm>
+      </p:grpSpPr>
+      <p:sp>
+        <p:nvSpPr>
+          <p:cNvPr id="2" name="Slide Image Placeholder 1"/>
+          <p:cNvSpPr>
+            <a:spLocks noGrp="1"/>
+          </p:cNvSpPr>
+          <p:nvPr>
+            <p:ph type="sldImg" idx="2"/>
+          </p:nvPr>
+        </p:nvSpPr>
+        <p:spPr/>
+      </p:sp>
+      <p:sp>
+        <p:nvSpPr>
+          <p:cNvPr id="3" name="Notes Placeholder 2"/>
+          <p:cNvSpPr>
+            <a:spLocks noGrp="1"/>
+          </p:cNvSpPr>
+          <p:nvPr>
+            <p:ph type="body" idx="3" sz="quarter"/>
+          </p:nvPr>
+        </p:nvSpPr>
+        <p:spPr/>
+        <p:txBody>
+          <a:bodyPr/>
+          <a:lstStyle/>
+          <a:p>
+            <a:r>
+              <a:t>SQL екраниране: НЕ е достатъчно! Параметризирани заявки: @parameter никога не се интерпретира като SQL код.</a:t>
+            </a:r>
+          </a:p>
+        </p:txBody>
+      </p:sp>
+      <p:sp>
+        <p:nvSpPr>
+          <p:cNvPr id="4" name="Slide Number Placeholder 3"/>
+          <p:cNvSpPr>
+            <a:spLocks noGrp="1"/>
+          </p:cNvSpPr>
+          <p:nvPr>
+            <p:ph type="sldNum" idx="5" sz="quarter"/>
+          </p:nvPr>
+        </p:nvSpPr>
+        <p:spPr/>
+      </p:sp>
+    </p:spTree>
+  </p:cSld>
+  <p:clrMapOvr>
+    <a:masterClrMapping/>
+  </p:clrMapOvr>
+</p:notes>
+</file>
+
+<file path=ppt/notesSlides/notesSlide8.xml><?xml version="1.0" encoding="utf-8"?>
+<p:notes xmlns:a="http://schemas.openxmlformats.org/drawingml/2006/main" xmlns:p="http://schemas.openxmlformats.org/presentationml/2006/main" xmlns:r="http://schemas.openxmlformats.org/officeDocument/2006/relationships">
+  <p:cSld>
+    <p:spTree>
+      <p:nvGrpSpPr>
+        <p:cNvPr id="1" name=""/>
+        <p:cNvGrpSpPr/>
+        <p:nvPr/>
+      </p:nvGrpSpPr>
+      <p:grpSpPr>
+        <a:xfrm>
+          <a:off x="0" y="0"/>
+          <a:ext cx="0" cy="0"/>
+          <a:chOff x="0" y="0"/>
+          <a:chExt cx="0" cy="0"/>
+        </a:xfrm>
+      </p:grpSpPr>
+      <p:sp>
+        <p:nvSpPr>
+          <p:cNvPr id="2" name="Slide Image Placeholder 1"/>
+          <p:cNvSpPr>
+            <a:spLocks noGrp="1"/>
+          </p:cNvSpPr>
+          <p:nvPr>
+            <p:ph type="sldImg" idx="2"/>
+          </p:nvPr>
+        </p:nvSpPr>
+        <p:spPr/>
+      </p:sp>
+      <p:sp>
+        <p:nvSpPr>
+          <p:cNvPr id="3" name="Notes Placeholder 2"/>
+          <p:cNvSpPr>
+            <a:spLocks noGrp="1"/>
+          </p:cNvSpPr>
+          <p:nvPr>
+            <p:ph type="body" idx="3" sz="quarter"/>
+          </p:nvPr>
+        </p:nvSpPr>
+        <p:spPr/>
+        <p:txBody>
+          <a:bodyPr/>
+          <a:lstStyle/>
+          <a:p>
+            <a:r>
+              <a:t>SqlParameter: стойността се предава ОТДЕЛНО от SQL командата.</a:t>
+            </a:r>
+          </a:p>
+        </p:txBody>
+      </p:sp>
+      <p:sp>
+        <p:nvSpPr>
+          <p:cNvPr id="4" name="Slide Number Placeholder 3"/>
+          <p:cNvSpPr>
+            <a:spLocks noGrp="1"/>
+          </p:cNvSpPr>
+          <p:nvPr>
+            <p:ph type="sldNum" idx="5" sz="quarter"/>
+          </p:nvPr>
+        </p:nvSpPr>
+        <p:spPr/>
+      </p:sp>
+    </p:spTree>
+  </p:cSld>
+  <p:clrMapOvr>
+    <a:masterClrMapping/>
+  </p:clrMapOvr>
+</p:notes>
+</file>
+
+<file path=ppt/notesSlides/notesSlide9.xml><?xml version="1.0" encoding="utf-8"?>
+<p:notes xmlns:a="http://schemas.openxmlformats.org/drawingml/2006/main" xmlns:p="http://schemas.openxmlformats.org/presentationml/2006/main" xmlns:r="http://schemas.openxmlformats.org/officeDocument/2006/relationships">
+  <p:cSld>
+    <p:spTree>
+      <p:nvGrpSpPr>
+        <p:cNvPr id="1" name=""/>
+        <p:cNvGrpSpPr/>
+        <p:nvPr/>
+      </p:nvGrpSpPr>
+      <p:grpSpPr>
+        <a:xfrm>
+          <a:off x="0" y="0"/>
+          <a:ext cx="0" cy="0"/>
+          <a:chOff x="0" y="0"/>
+          <a:chExt cx="0" cy="0"/>
+        </a:xfrm>
+      </p:grpSpPr>
+      <p:sp>
+        <p:nvSpPr>
+          <p:cNvPr id="2" name="Slide Image Placeholder 1"/>
+          <p:cNvSpPr>
+            <a:spLocks noGrp="1"/>
+          </p:cNvSpPr>
+          <p:nvPr>
+            <p:ph type="sldImg" idx="2"/>
+          </p:nvPr>
+        </p:nvSpPr>
+        <p:spPr/>
+      </p:sp>
+      <p:sp>
+        <p:nvSpPr>
+          <p:cNvPr id="3" name="Notes Placeholder 2"/>
+          <p:cNvSpPr>
+            <a:spLocks noGrp="1"/>
+          </p:cNvSpPr>
+          <p:nvPr>
+            <p:ph type="body" idx="3" sz="quarter"/>
+          </p:nvPr>
+        </p:nvSpPr>
+        <p:spPr/>
+        <p:txBody>
+          <a:bodyPr/>
+          <a:lstStyle/>
+          <a:p>
+            <a:r>
+              <a:t>ПРАВИЛО: Ако има потребителски вход -&gt; ЗАДЪЛЖИТЕЛНО @параметри!</a:t>
+            </a:r>
+          </a:p>
+        </p:txBody>
+      </p:sp>
+      <p:sp>
+        <p:nvSpPr>
+          <p:cNvPr id="4" name="Slide Number Placeholder 3"/>
+          <p:cNvSpPr>
+            <a:spLocks noGrp="1"/>
+          </p:cNvSpPr>
+          <p:nvPr>
+            <p:ph type="sldNum" idx="5" sz="quarter"/>
+          </p:nvPr>
+        </p:nvSpPr>
+        <p:spPr/>
+      </p:sp>
+    </p:spTree>
   </p:cSld>
   <p:clrMapOvr>
     <a:masterClrMapping/>
@@ -4830,6 +5534,171 @@
         <p14:creationId xmlns:p14="http://schemas.microsoft.com/office/powerpoint/2010/main" val="1241344677"/>
       </p:ext>
     </p:extLst>
+  </p:cSld>
+  <p:clrMapOvr>
+    <a:masterClrMapping/>
+  </p:clrMapOvr>
+</p:sld>
+</file>
+
+<file path=ppt/slides/slide11.xml><?xml version="1.0" encoding="utf-8"?>
+<p:sld xmlns:a="http://schemas.openxmlformats.org/drawingml/2006/main" xmlns:p="http://schemas.openxmlformats.org/presentationml/2006/main" xmlns:r="http://schemas.openxmlformats.org/officeDocument/2006/relationships">
+  <p:cSld>
+    <p:spTree>
+      <p:nvGrpSpPr>
+        <p:cNvPr id="1" name=""/>
+        <p:cNvGrpSpPr/>
+        <p:nvPr/>
+      </p:nvGrpSpPr>
+      <p:grpSpPr/>
+      <p:sp>
+        <p:nvSpPr>
+          <p:cNvPr id="2" name="Title 1"/>
+          <p:cNvSpPr>
+            <a:spLocks noGrp="1"/>
+          </p:cNvSpPr>
+          <p:nvPr>
+            <p:ph type="title"/>
+          </p:nvPr>
+        </p:nvSpPr>
+        <p:spPr/>
+        <p:txBody>
+          <a:bodyPr/>
+          <a:lstStyle/>
+          <a:p>
+            <a:r>
+              <a:t>SQL Инжекция — Демонстрация</a:t>
+            </a:r>
+          </a:p>
+        </p:txBody>
+      </p:sp>
+      <p:sp>
+        <p:nvSpPr>
+          <p:cNvPr id="3" name="Content Placeholder 2"/>
+          <p:cNvSpPr>
+            <a:spLocks noGrp="1"/>
+          </p:cNvSpPr>
+          <p:nvPr>
+            <p:ph idx="1"/>
+          </p:nvPr>
+        </p:nvSpPr>
+        <p:spPr/>
+        <p:txBody>
+          <a:bodyPr/>
+          <a:lstStyle/>
+          <a:p>
+            <a:r>
+              <a:t>Уязвим: WHERE Name='" + input + "'</a:t>
+            </a:r>
+          </a:p>
+          <a:p>
+            <a:r>
+              <a:t>Нормален: input='admin' → WHERE Name='admin' OK</a:t>
+            </a:r>
+          </a:p>
+          <a:p>
+            <a:r>
+              <a:t>Инжекция: input="' OR '1'='1" → ALWAYS TRUE!</a:t>
+            </a:r>
+          </a:p>
+          <a:p>
+            <a:r>
+              <a:t>DROP инжекция: input="'; DROP TABLE Users; --"</a:t>
+            </a:r>
+          </a:p>
+          <a:p>
+            <a:r>
+              <a:t>Целият ШАБЛОН: Заменете конкатенацията с @параметри!</a:t>
+            </a:r>
+          </a:p>
+        </p:txBody>
+      </p:sp>
+    </p:spTree>
+  </p:cSld>
+  <p:clrMapOvr>
+    <a:masterClrMapping/>
+  </p:clrMapOvr>
+</p:sld>
+</file>
+
+<file path=ppt/slides/slide12.xml><?xml version="1.0" encoding="utf-8"?>
+<p:sld xmlns:a="http://schemas.openxmlformats.org/drawingml/2006/main" xmlns:p="http://schemas.openxmlformats.org/presentationml/2006/main" xmlns:r="http://schemas.openxmlformats.org/officeDocument/2006/relationships">
+  <p:cSld>
+    <p:spTree>
+      <p:nvGrpSpPr>
+        <p:cNvPr id="1" name=""/>
+        <p:cNvGrpSpPr/>
+        <p:nvPr/>
+      </p:nvGrpSpPr>
+      <p:grpSpPr/>
+      <p:sp>
+        <p:nvSpPr>
+          <p:cNvPr id="2" name="Title 1"/>
+          <p:cNvSpPr>
+            <a:spLocks noGrp="1"/>
+          </p:cNvSpPr>
+          <p:nvPr>
+            <p:ph type="title"/>
+          </p:nvPr>
+        </p:nvSpPr>
+        <p:spPr/>
+        <p:txBody>
+          <a:bodyPr/>
+          <a:lstStyle/>
+          <a:p>
+            <a:r>
+              <a:t>Параметризирани команди — Правилният начин</a:t>
+            </a:r>
+          </a:p>
+        </p:txBody>
+      </p:sp>
+      <p:sp>
+        <p:nvSpPr>
+          <p:cNvPr id="3" name="Content Placeholder 2"/>
+          <p:cNvSpPr>
+            <a:spLocks noGrp="1"/>
+          </p:cNvSpPr>
+          <p:nvPr>
+            <p:ph idx="1"/>
+          </p:nvPr>
+        </p:nvSpPr>
+        <p:spPr/>
+        <p:txBody>
+          <a:bodyPr/>
+          <a:lstStyle/>
+          <a:p>
+            <a:r>
+              <a:t>ГРЕШНО: sql = $"INSERT VALUES ('{name}', '{pass}')"</a:t>
+            </a:r>
+          </a:p>
+          <a:p>
+            <a:r>
+              <a:t>ПРАВИЛНО: sql = "INSERT VALUES (@name, @pass)"</a:t>
+            </a:r>
+          </a:p>
+          <a:p>
+            <a:r>
+              <a:t>cmd.Parameters.AddWithValue("@name", name);</a:t>
+            </a:r>
+          </a:p>
+          <a:p>
+            <a:r>
+              <a:t>cmd.Parameters.AddWithValue("@pass", pass);</a:t>
+            </a:r>
+          </a:p>
+          <a:p>
+            <a:r>
+              <a:t>Предимства: защита, по-бърза компилация, авто ескапинг</a:t>
+            </a:r>
+          </a:p>
+          <a:p>
+            <a:r>
+              <a:t>ПРАВИЛО: Ако има потребителски вход → @параметри!</a:t>
+            </a:r>
+          </a:p>
+        </p:txBody>
+      </p:sp>
+    </p:spTree>
   </p:cSld>
   <p:clrMapOvr>
     <a:masterClrMapping/>
